--- a/Similarity_and_Dissimilarity_Data_Mining.pptx
+++ b/Similarity_and_Dissimilarity_Data_Mining.pptx
@@ -5,22 +5,22 @@
     <p:sldMasterId id="2147483648" r:id="rId1"/>
   </p:sldMasterIdLst>
   <p:sldIdLst>
-    <p:sldId id="256" r:id="rId7"/>
-    <p:sldId id="257" r:id="rId8"/>
-    <p:sldId id="258" r:id="rId9"/>
-    <p:sldId id="259" r:id="rId10"/>
-    <p:sldId id="260" r:id="rId11"/>
-    <p:sldId id="261" r:id="rId12"/>
-    <p:sldId id="262" r:id="rId13"/>
-    <p:sldId id="263" r:id="rId14"/>
-    <p:sldId id="264" r:id="rId15"/>
-    <p:sldId id="265" r:id="rId16"/>
-    <p:sldId id="266" r:id="rId17"/>
-    <p:sldId id="267" r:id="rId18"/>
-    <p:sldId id="268" r:id="rId19"/>
-    <p:sldId id="269" r:id="rId20"/>
+    <p:sldId id="256" r:id="rId2"/>
+    <p:sldId id="257" r:id="rId3"/>
+    <p:sldId id="258" r:id="rId4"/>
+    <p:sldId id="259" r:id="rId5"/>
+    <p:sldId id="260" r:id="rId6"/>
+    <p:sldId id="261" r:id="rId7"/>
+    <p:sldId id="262" r:id="rId8"/>
+    <p:sldId id="263" r:id="rId9"/>
+    <p:sldId id="264" r:id="rId10"/>
+    <p:sldId id="265" r:id="rId11"/>
+    <p:sldId id="266" r:id="rId12"/>
+    <p:sldId id="267" r:id="rId13"/>
+    <p:sldId id="268" r:id="rId14"/>
+    <p:sldId id="269" r:id="rId15"/>
   </p:sldIdLst>
-  <p:sldSz cx="12191695" cy="6858000" type="screen4x3"/>
+  <p:sldSz cx="12192000" cy="6858000"/>
   <p:notesSz cx="6858000" cy="9144000"/>
   <p:defaultTextStyle>
     <a:defPPr>
@@ -117,6 +117,22 @@
       </a:defRPr>
     </a:lvl9pPr>
   </p:defaultTextStyle>
+  <p:extLst>
+    <p:ext uri="{EFAFB233-063F-42B5-8137-9DF3F51BA10A}">
+      <p15:sldGuideLst xmlns:p15="http://schemas.microsoft.com/office/powerpoint/2012/main">
+        <p15:guide id="1" orient="horz" pos="2160">
+          <p15:clr>
+            <a:srgbClr val="A4A3A4"/>
+          </p15:clr>
+        </p15:guide>
+        <p15:guide id="2" pos="2880">
+          <p15:clr>
+            <a:srgbClr val="A4A3A4"/>
+          </p15:clr>
+        </p15:guide>
+      </p15:sldGuideLst>
+    </p:ext>
+  </p:extLst>
 </p:presentation>
 </file>
 
@@ -158,10 +174,9 @@
           <a:lstStyle/>
           <a:p>
             <a:r>
-              <a:rPr lang="en-US" smtClean="0"/>
+              <a:rPr lang="en-US"/>
               <a:t>Click to edit Master title style</a:t>
             </a:r>
-            <a:endParaRPr lang="en-US"/>
           </a:p>
         </p:txBody>
       </p:sp>
@@ -277,10 +292,9 @@
           </a:lstStyle>
           <a:p>
             <a:r>
-              <a:rPr lang="en-US" smtClean="0"/>
+              <a:rPr lang="en-US"/>
               <a:t>Click to edit Master subtitle style</a:t>
             </a:r>
-            <a:endParaRPr lang="en-US"/>
           </a:p>
         </p:txBody>
       </p:sp>
@@ -301,7 +315,7 @@
           <a:p>
             <a:fld id="{5BCAD085-E8A6-8845-BD4E-CB4CCA059FC4}" type="datetimeFigureOut">
               <a:rPr lang="en-US" smtClean="0"/>
-              <a:t>1/27/13</a:t>
+              <a:t>8/10/2026</a:t>
             </a:fld>
             <a:endParaRPr lang="en-US"/>
           </a:p>
@@ -395,10 +409,9 @@
           <a:lstStyle/>
           <a:p>
             <a:r>
-              <a:rPr lang="en-US" smtClean="0"/>
+              <a:rPr lang="en-US"/>
               <a:t>Click to edit Master title style</a:t>
             </a:r>
-            <a:endParaRPr lang="en-US"/>
           </a:p>
         </p:txBody>
       </p:sp>
@@ -419,38 +432,37 @@
           <a:p>
             <a:pPr lvl="0"/>
             <a:r>
-              <a:rPr lang="en-US" smtClean="0"/>
+              <a:rPr lang="en-US"/>
               <a:t>Click to edit Master text styles</a:t>
             </a:r>
           </a:p>
           <a:p>
             <a:pPr lvl="1"/>
             <a:r>
-              <a:rPr lang="en-US" smtClean="0"/>
+              <a:rPr lang="en-US"/>
               <a:t>Second level</a:t>
             </a:r>
           </a:p>
           <a:p>
             <a:pPr lvl="2"/>
             <a:r>
-              <a:rPr lang="en-US" smtClean="0"/>
+              <a:rPr lang="en-US"/>
               <a:t>Third level</a:t>
             </a:r>
           </a:p>
           <a:p>
             <a:pPr lvl="3"/>
             <a:r>
-              <a:rPr lang="en-US" smtClean="0"/>
+              <a:rPr lang="en-US"/>
               <a:t>Fourth level</a:t>
             </a:r>
           </a:p>
           <a:p>
             <a:pPr lvl="4"/>
             <a:r>
-              <a:rPr lang="en-US" smtClean="0"/>
+              <a:rPr lang="en-US"/>
               <a:t>Fifth level</a:t>
             </a:r>
-            <a:endParaRPr lang="en-US"/>
           </a:p>
         </p:txBody>
       </p:sp>
@@ -471,7 +483,7 @@
           <a:p>
             <a:fld id="{5BCAD085-E8A6-8845-BD4E-CB4CCA059FC4}" type="datetimeFigureOut">
               <a:rPr lang="en-US" smtClean="0"/>
-              <a:t>1/27/13</a:t>
+              <a:t>8/10/2026</a:t>
             </a:fld>
             <a:endParaRPr lang="en-US"/>
           </a:p>
@@ -570,10 +582,9 @@
           <a:lstStyle/>
           <a:p>
             <a:r>
-              <a:rPr lang="en-US" smtClean="0"/>
+              <a:rPr lang="en-US"/>
               <a:t>Click to edit Master title style</a:t>
             </a:r>
-            <a:endParaRPr lang="en-US"/>
           </a:p>
         </p:txBody>
       </p:sp>
@@ -599,38 +610,37 @@
           <a:p>
             <a:pPr lvl="0"/>
             <a:r>
-              <a:rPr lang="en-US" smtClean="0"/>
+              <a:rPr lang="en-US"/>
               <a:t>Click to edit Master text styles</a:t>
             </a:r>
           </a:p>
           <a:p>
             <a:pPr lvl="1"/>
             <a:r>
-              <a:rPr lang="en-US" smtClean="0"/>
+              <a:rPr lang="en-US"/>
               <a:t>Second level</a:t>
             </a:r>
           </a:p>
           <a:p>
             <a:pPr lvl="2"/>
             <a:r>
-              <a:rPr lang="en-US" smtClean="0"/>
+              <a:rPr lang="en-US"/>
               <a:t>Third level</a:t>
             </a:r>
           </a:p>
           <a:p>
             <a:pPr lvl="3"/>
             <a:r>
-              <a:rPr lang="en-US" smtClean="0"/>
+              <a:rPr lang="en-US"/>
               <a:t>Fourth level</a:t>
             </a:r>
           </a:p>
           <a:p>
             <a:pPr lvl="4"/>
             <a:r>
-              <a:rPr lang="en-US" smtClean="0"/>
+              <a:rPr lang="en-US"/>
               <a:t>Fifth level</a:t>
             </a:r>
-            <a:endParaRPr lang="en-US"/>
           </a:p>
         </p:txBody>
       </p:sp>
@@ -651,7 +661,7 @@
           <a:p>
             <a:fld id="{5BCAD085-E8A6-8845-BD4E-CB4CCA059FC4}" type="datetimeFigureOut">
               <a:rPr lang="en-US" smtClean="0"/>
-              <a:t>1/27/13</a:t>
+              <a:t>8/10/2026</a:t>
             </a:fld>
             <a:endParaRPr lang="en-US"/>
           </a:p>
@@ -745,10 +755,9 @@
           <a:lstStyle/>
           <a:p>
             <a:r>
-              <a:rPr lang="en-US" smtClean="0"/>
+              <a:rPr lang="en-US"/>
               <a:t>Click to edit Master title style</a:t>
             </a:r>
-            <a:endParaRPr lang="en-US"/>
           </a:p>
         </p:txBody>
       </p:sp>
@@ -769,38 +778,37 @@
           <a:p>
             <a:pPr lvl="0"/>
             <a:r>
-              <a:rPr lang="en-US" smtClean="0"/>
+              <a:rPr lang="en-US"/>
               <a:t>Click to edit Master text styles</a:t>
             </a:r>
           </a:p>
           <a:p>
             <a:pPr lvl="1"/>
             <a:r>
-              <a:rPr lang="en-US" smtClean="0"/>
+              <a:rPr lang="en-US"/>
               <a:t>Second level</a:t>
             </a:r>
           </a:p>
           <a:p>
             <a:pPr lvl="2"/>
             <a:r>
-              <a:rPr lang="en-US" smtClean="0"/>
+              <a:rPr lang="en-US"/>
               <a:t>Third level</a:t>
             </a:r>
           </a:p>
           <a:p>
             <a:pPr lvl="3"/>
             <a:r>
-              <a:rPr lang="en-US" smtClean="0"/>
+              <a:rPr lang="en-US"/>
               <a:t>Fourth level</a:t>
             </a:r>
           </a:p>
           <a:p>
             <a:pPr lvl="4"/>
             <a:r>
-              <a:rPr lang="en-US" smtClean="0"/>
+              <a:rPr lang="en-US"/>
               <a:t>Fifth level</a:t>
             </a:r>
-            <a:endParaRPr lang="en-US"/>
           </a:p>
         </p:txBody>
       </p:sp>
@@ -821,7 +829,7 @@
           <a:p>
             <a:fld id="{5BCAD085-E8A6-8845-BD4E-CB4CCA059FC4}" type="datetimeFigureOut">
               <a:rPr lang="en-US" smtClean="0"/>
-              <a:t>1/27/13</a:t>
+              <a:t>8/10/2026</a:t>
             </a:fld>
             <a:endParaRPr lang="en-US"/>
           </a:p>
@@ -924,10 +932,9 @@
           </a:lstStyle>
           <a:p>
             <a:r>
-              <a:rPr lang="en-US" smtClean="0"/>
+              <a:rPr lang="en-US"/>
               <a:t>Click to edit Master title style</a:t>
             </a:r>
-            <a:endParaRPr lang="en-US"/>
           </a:p>
         </p:txBody>
       </p:sp>
@@ -1044,7 +1051,7 @@
           <a:p>
             <a:pPr lvl="0"/>
             <a:r>
-              <a:rPr lang="en-US" smtClean="0"/>
+              <a:rPr lang="en-US"/>
               <a:t>Click to edit Master text styles</a:t>
             </a:r>
           </a:p>
@@ -1067,7 +1074,7 @@
           <a:p>
             <a:fld id="{5BCAD085-E8A6-8845-BD4E-CB4CCA059FC4}" type="datetimeFigureOut">
               <a:rPr lang="en-US" smtClean="0"/>
-              <a:t>1/27/13</a:t>
+              <a:t>8/10/2026</a:t>
             </a:fld>
             <a:endParaRPr lang="en-US"/>
           </a:p>
@@ -1161,10 +1168,9 @@
           <a:lstStyle/>
           <a:p>
             <a:r>
-              <a:rPr lang="en-US" smtClean="0"/>
+              <a:rPr lang="en-US"/>
               <a:t>Click to edit Master title style</a:t>
             </a:r>
-            <a:endParaRPr lang="en-US"/>
           </a:p>
         </p:txBody>
       </p:sp>
@@ -1218,38 +1224,37 @@
           <a:p>
             <a:pPr lvl="0"/>
             <a:r>
-              <a:rPr lang="en-US" smtClean="0"/>
+              <a:rPr lang="en-US"/>
               <a:t>Click to edit Master text styles</a:t>
             </a:r>
           </a:p>
           <a:p>
             <a:pPr lvl="1"/>
             <a:r>
-              <a:rPr lang="en-US" smtClean="0"/>
+              <a:rPr lang="en-US"/>
               <a:t>Second level</a:t>
             </a:r>
           </a:p>
           <a:p>
             <a:pPr lvl="2"/>
             <a:r>
-              <a:rPr lang="en-US" smtClean="0"/>
+              <a:rPr lang="en-US"/>
               <a:t>Third level</a:t>
             </a:r>
           </a:p>
           <a:p>
             <a:pPr lvl="3"/>
             <a:r>
-              <a:rPr lang="en-US" smtClean="0"/>
+              <a:rPr lang="en-US"/>
               <a:t>Fourth level</a:t>
             </a:r>
           </a:p>
           <a:p>
             <a:pPr lvl="4"/>
             <a:r>
-              <a:rPr lang="en-US" smtClean="0"/>
+              <a:rPr lang="en-US"/>
               <a:t>Fifth level</a:t>
             </a:r>
-            <a:endParaRPr lang="en-US"/>
           </a:p>
         </p:txBody>
       </p:sp>
@@ -1303,38 +1308,37 @@
           <a:p>
             <a:pPr lvl="0"/>
             <a:r>
-              <a:rPr lang="en-US" smtClean="0"/>
+              <a:rPr lang="en-US"/>
               <a:t>Click to edit Master text styles</a:t>
             </a:r>
           </a:p>
           <a:p>
             <a:pPr lvl="1"/>
             <a:r>
-              <a:rPr lang="en-US" smtClean="0"/>
+              <a:rPr lang="en-US"/>
               <a:t>Second level</a:t>
             </a:r>
           </a:p>
           <a:p>
             <a:pPr lvl="2"/>
             <a:r>
-              <a:rPr lang="en-US" smtClean="0"/>
+              <a:rPr lang="en-US"/>
               <a:t>Third level</a:t>
             </a:r>
           </a:p>
           <a:p>
             <a:pPr lvl="3"/>
             <a:r>
-              <a:rPr lang="en-US" smtClean="0"/>
+              <a:rPr lang="en-US"/>
               <a:t>Fourth level</a:t>
             </a:r>
           </a:p>
           <a:p>
             <a:pPr lvl="4"/>
             <a:r>
-              <a:rPr lang="en-US" smtClean="0"/>
+              <a:rPr lang="en-US"/>
               <a:t>Fifth level</a:t>
             </a:r>
-            <a:endParaRPr lang="en-US"/>
           </a:p>
         </p:txBody>
       </p:sp>
@@ -1355,7 +1359,7 @@
           <a:p>
             <a:fld id="{5BCAD085-E8A6-8845-BD4E-CB4CCA059FC4}" type="datetimeFigureOut">
               <a:rPr lang="en-US" smtClean="0"/>
-              <a:t>1/27/13</a:t>
+              <a:t>8/10/2026</a:t>
             </a:fld>
             <a:endParaRPr lang="en-US"/>
           </a:p>
@@ -1453,10 +1457,9 @@
           </a:lstStyle>
           <a:p>
             <a:r>
-              <a:rPr lang="en-US" smtClean="0"/>
+              <a:rPr lang="en-US"/>
               <a:t>Click to edit Master title style</a:t>
             </a:r>
-            <a:endParaRPr lang="en-US"/>
           </a:p>
         </p:txBody>
       </p:sp>
@@ -1519,7 +1522,7 @@
           <a:p>
             <a:pPr lvl="0"/>
             <a:r>
-              <a:rPr lang="en-US" smtClean="0"/>
+              <a:rPr lang="en-US"/>
               <a:t>Click to edit Master text styles</a:t>
             </a:r>
           </a:p>
@@ -1575,38 +1578,37 @@
           <a:p>
             <a:pPr lvl="0"/>
             <a:r>
-              <a:rPr lang="en-US" smtClean="0"/>
+              <a:rPr lang="en-US"/>
               <a:t>Click to edit Master text styles</a:t>
             </a:r>
           </a:p>
           <a:p>
             <a:pPr lvl="1"/>
             <a:r>
-              <a:rPr lang="en-US" smtClean="0"/>
+              <a:rPr lang="en-US"/>
               <a:t>Second level</a:t>
             </a:r>
           </a:p>
           <a:p>
             <a:pPr lvl="2"/>
             <a:r>
-              <a:rPr lang="en-US" smtClean="0"/>
+              <a:rPr lang="en-US"/>
               <a:t>Third level</a:t>
             </a:r>
           </a:p>
           <a:p>
             <a:pPr lvl="3"/>
             <a:r>
-              <a:rPr lang="en-US" smtClean="0"/>
+              <a:rPr lang="en-US"/>
               <a:t>Fourth level</a:t>
             </a:r>
           </a:p>
           <a:p>
             <a:pPr lvl="4"/>
             <a:r>
-              <a:rPr lang="en-US" smtClean="0"/>
+              <a:rPr lang="en-US"/>
               <a:t>Fifth level</a:t>
             </a:r>
-            <a:endParaRPr lang="en-US"/>
           </a:p>
         </p:txBody>
       </p:sp>
@@ -1669,7 +1671,7 @@
           <a:p>
             <a:pPr lvl="0"/>
             <a:r>
-              <a:rPr lang="en-US" smtClean="0"/>
+              <a:rPr lang="en-US"/>
               <a:t>Click to edit Master text styles</a:t>
             </a:r>
           </a:p>
@@ -1725,38 +1727,37 @@
           <a:p>
             <a:pPr lvl="0"/>
             <a:r>
-              <a:rPr lang="en-US" smtClean="0"/>
+              <a:rPr lang="en-US"/>
               <a:t>Click to edit Master text styles</a:t>
             </a:r>
           </a:p>
           <a:p>
             <a:pPr lvl="1"/>
             <a:r>
-              <a:rPr lang="en-US" smtClean="0"/>
+              <a:rPr lang="en-US"/>
               <a:t>Second level</a:t>
             </a:r>
           </a:p>
           <a:p>
             <a:pPr lvl="2"/>
             <a:r>
-              <a:rPr lang="en-US" smtClean="0"/>
+              <a:rPr lang="en-US"/>
               <a:t>Third level</a:t>
             </a:r>
           </a:p>
           <a:p>
             <a:pPr lvl="3"/>
             <a:r>
-              <a:rPr lang="en-US" smtClean="0"/>
+              <a:rPr lang="en-US"/>
               <a:t>Fourth level</a:t>
             </a:r>
           </a:p>
           <a:p>
             <a:pPr lvl="4"/>
             <a:r>
-              <a:rPr lang="en-US" smtClean="0"/>
+              <a:rPr lang="en-US"/>
               <a:t>Fifth level</a:t>
             </a:r>
-            <a:endParaRPr lang="en-US"/>
           </a:p>
         </p:txBody>
       </p:sp>
@@ -1777,7 +1778,7 @@
           <a:p>
             <a:fld id="{5BCAD085-E8A6-8845-BD4E-CB4CCA059FC4}" type="datetimeFigureOut">
               <a:rPr lang="en-US" smtClean="0"/>
-              <a:t>1/27/13</a:t>
+              <a:t>8/10/2026</a:t>
             </a:fld>
             <a:endParaRPr lang="en-US"/>
           </a:p>
@@ -1871,10 +1872,9 @@
           <a:lstStyle/>
           <a:p>
             <a:r>
-              <a:rPr lang="en-US" smtClean="0"/>
+              <a:rPr lang="en-US"/>
               <a:t>Click to edit Master title style</a:t>
             </a:r>
-            <a:endParaRPr lang="en-US"/>
           </a:p>
         </p:txBody>
       </p:sp>
@@ -1895,7 +1895,7 @@
           <a:p>
             <a:fld id="{5BCAD085-E8A6-8845-BD4E-CB4CCA059FC4}" type="datetimeFigureOut">
               <a:rPr lang="en-US" smtClean="0"/>
-              <a:t>1/27/13</a:t>
+              <a:t>8/10/2026</a:t>
             </a:fld>
             <a:endParaRPr lang="en-US"/>
           </a:p>
@@ -1990,7 +1990,7 @@
           <a:p>
             <a:fld id="{5BCAD085-E8A6-8845-BD4E-CB4CCA059FC4}" type="datetimeFigureOut">
               <a:rPr lang="en-US" smtClean="0"/>
-              <a:t>1/27/13</a:t>
+              <a:t>8/10/2026</a:t>
             </a:fld>
             <a:endParaRPr lang="en-US"/>
           </a:p>
@@ -2093,10 +2093,9 @@
           </a:lstStyle>
           <a:p>
             <a:r>
-              <a:rPr lang="en-US" smtClean="0"/>
+              <a:rPr lang="en-US"/>
               <a:t>Click to edit Master title style</a:t>
             </a:r>
-            <a:endParaRPr lang="en-US"/>
           </a:p>
         </p:txBody>
       </p:sp>
@@ -2150,38 +2149,37 @@
           <a:p>
             <a:pPr lvl="0"/>
             <a:r>
-              <a:rPr lang="en-US" smtClean="0"/>
+              <a:rPr lang="en-US"/>
               <a:t>Click to edit Master text styles</a:t>
             </a:r>
           </a:p>
           <a:p>
             <a:pPr lvl="1"/>
             <a:r>
-              <a:rPr lang="en-US" smtClean="0"/>
+              <a:rPr lang="en-US"/>
               <a:t>Second level</a:t>
             </a:r>
           </a:p>
           <a:p>
             <a:pPr lvl="2"/>
             <a:r>
-              <a:rPr lang="en-US" smtClean="0"/>
+              <a:rPr lang="en-US"/>
               <a:t>Third level</a:t>
             </a:r>
           </a:p>
           <a:p>
             <a:pPr lvl="3"/>
             <a:r>
-              <a:rPr lang="en-US" smtClean="0"/>
+              <a:rPr lang="en-US"/>
               <a:t>Fourth level</a:t>
             </a:r>
           </a:p>
           <a:p>
             <a:pPr lvl="4"/>
             <a:r>
-              <a:rPr lang="en-US" smtClean="0"/>
+              <a:rPr lang="en-US"/>
               <a:t>Fifth level</a:t>
             </a:r>
-            <a:endParaRPr lang="en-US"/>
           </a:p>
         </p:txBody>
       </p:sp>
@@ -2244,7 +2242,7 @@
           <a:p>
             <a:pPr lvl="0"/>
             <a:r>
-              <a:rPr lang="en-US" smtClean="0"/>
+              <a:rPr lang="en-US"/>
               <a:t>Click to edit Master text styles</a:t>
             </a:r>
           </a:p>
@@ -2267,7 +2265,7 @@
           <a:p>
             <a:fld id="{5BCAD085-E8A6-8845-BD4E-CB4CCA059FC4}" type="datetimeFigureOut">
               <a:rPr lang="en-US" smtClean="0"/>
-              <a:t>1/27/13</a:t>
+              <a:t>8/10/2026</a:t>
             </a:fld>
             <a:endParaRPr lang="en-US"/>
           </a:p>
@@ -2370,10 +2368,9 @@
           </a:lstStyle>
           <a:p>
             <a:r>
-              <a:rPr lang="en-US" smtClean="0"/>
+              <a:rPr lang="en-US"/>
               <a:t>Click to edit Master title style</a:t>
             </a:r>
-            <a:endParaRPr lang="en-US"/>
           </a:p>
         </p:txBody>
       </p:sp>
@@ -2497,7 +2494,7 @@
           <a:p>
             <a:pPr lvl="0"/>
             <a:r>
-              <a:rPr lang="en-US" smtClean="0"/>
+              <a:rPr lang="en-US"/>
               <a:t>Click to edit Master text styles</a:t>
             </a:r>
           </a:p>
@@ -2520,7 +2517,7 @@
           <a:p>
             <a:fld id="{5BCAD085-E8A6-8845-BD4E-CB4CCA059FC4}" type="datetimeFigureOut">
               <a:rPr lang="en-US" smtClean="0"/>
-              <a:t>1/27/13</a:t>
+              <a:t>8/10/2026</a:t>
             </a:fld>
             <a:endParaRPr lang="en-US"/>
           </a:p>
@@ -2629,10 +2626,9 @@
           <a:lstStyle/>
           <a:p>
             <a:r>
-              <a:rPr lang="en-US" smtClean="0"/>
+              <a:rPr lang="en-US"/>
               <a:t>Click to edit Master title style</a:t>
             </a:r>
-            <a:endParaRPr lang="en-US"/>
           </a:p>
         </p:txBody>
       </p:sp>
@@ -2663,38 +2659,37 @@
           <a:p>
             <a:pPr lvl="0"/>
             <a:r>
-              <a:rPr lang="en-US" smtClean="0"/>
+              <a:rPr lang="en-US"/>
               <a:t>Click to edit Master text styles</a:t>
             </a:r>
           </a:p>
           <a:p>
             <a:pPr lvl="1"/>
             <a:r>
-              <a:rPr lang="en-US" smtClean="0"/>
+              <a:rPr lang="en-US"/>
               <a:t>Second level</a:t>
             </a:r>
           </a:p>
           <a:p>
             <a:pPr lvl="2"/>
             <a:r>
-              <a:rPr lang="en-US" smtClean="0"/>
+              <a:rPr lang="en-US"/>
               <a:t>Third level</a:t>
             </a:r>
           </a:p>
           <a:p>
             <a:pPr lvl="3"/>
             <a:r>
-              <a:rPr lang="en-US" smtClean="0"/>
+              <a:rPr lang="en-US"/>
               <a:t>Fourth level</a:t>
             </a:r>
           </a:p>
           <a:p>
             <a:pPr lvl="4"/>
             <a:r>
-              <a:rPr lang="en-US" smtClean="0"/>
+              <a:rPr lang="en-US"/>
               <a:t>Fifth level</a:t>
             </a:r>
-            <a:endParaRPr lang="en-US"/>
           </a:p>
         </p:txBody>
       </p:sp>
@@ -2733,7 +2728,7 @@
           <a:p>
             <a:fld id="{5BCAD085-E8A6-8845-BD4E-CB4CCA059FC4}" type="datetimeFigureOut">
               <a:rPr lang="en-US" smtClean="0"/>
-              <a:t>1/27/13</a:t>
+              <a:t>8/10/2026</a:t>
             </a:fld>
             <a:endParaRPr lang="en-US"/>
           </a:p>
@@ -3092,7 +3087,7 @@
 </file>
 
 <file path=ppt/slides/slide1.xml><?xml version="1.0" encoding="utf-8"?>
-<p:sld xmlns:a="http://schemas.openxmlformats.org/drawingml/2006/main" xmlns:p="http://schemas.openxmlformats.org/presentationml/2006/main" xmlns:r="http://schemas.openxmlformats.org/officeDocument/2006/relationships">
+<p:sld xmlns:a="http://schemas.openxmlformats.org/drawingml/2006/main" xmlns:r="http://schemas.openxmlformats.org/officeDocument/2006/relationships" xmlns:p="http://schemas.openxmlformats.org/presentationml/2006/main">
   <p:cSld>
     <p:spTree>
       <p:nvGrpSpPr>
@@ -3100,7 +3095,14 @@
         <p:cNvGrpSpPr/>
         <p:nvPr/>
       </p:nvGrpSpPr>
-      <p:grpSpPr/>
+      <p:grpSpPr>
+        <a:xfrm>
+          <a:off x="0" y="0"/>
+          <a:ext cx="0" cy="0"/>
+          <a:chOff x="0" y="0"/>
+          <a:chExt cx="0" cy="0"/>
+        </a:xfrm>
+      </p:grpSpPr>
       <p:sp>
         <p:nvSpPr>
           <p:cNvPr id="2" name="TextBox 1"/>
@@ -3250,7 +3252,7 @@
 </file>
 
 <file path=ppt/slides/slide10.xml><?xml version="1.0" encoding="utf-8"?>
-<p:sld xmlns:a="http://schemas.openxmlformats.org/drawingml/2006/main" xmlns:p="http://schemas.openxmlformats.org/presentationml/2006/main" xmlns:r="http://schemas.openxmlformats.org/officeDocument/2006/relationships">
+<p:sld xmlns:a="http://schemas.openxmlformats.org/drawingml/2006/main" xmlns:r="http://schemas.openxmlformats.org/officeDocument/2006/relationships" xmlns:p="http://schemas.openxmlformats.org/presentationml/2006/main">
   <p:cSld>
     <p:spTree>
       <p:nvGrpSpPr>
@@ -3258,7 +3260,14 @@
         <p:cNvGrpSpPr/>
         <p:nvPr/>
       </p:nvGrpSpPr>
-      <p:grpSpPr/>
+      <p:grpSpPr>
+        <a:xfrm>
+          <a:off x="0" y="0"/>
+          <a:ext cx="0" cy="0"/>
+          <a:chOff x="0" y="0"/>
+          <a:chExt cx="0" cy="0"/>
+        </a:xfrm>
+      </p:grpSpPr>
       <p:sp>
         <p:nvSpPr>
           <p:cNvPr id="2" name="TextBox 1"/>
@@ -3340,8 +3349,8 @@
         </p:nvSpPr>
         <p:spPr>
           <a:xfrm>
-            <a:off x="914400" y="2606040"/>
-            <a:ext cx="10241280" cy="3474720"/>
+            <a:off x="1253612" y="3819832"/>
+            <a:ext cx="9902067" cy="3508653"/>
           </a:xfrm>
           <a:prstGeom prst="rect">
             <a:avLst/>
@@ -3361,6 +3370,7 @@
               <a:defRPr sz="1900"/>
             </a:pPr>
             <a:r>
+              <a:rPr dirty="0"/>
               <a:t>Measures the angle between two vectors; widely used in text and document mining.</a:t>
             </a:r>
           </a:p>
@@ -3372,6 +3382,7 @@
               <a:defRPr sz="1900"/>
             </a:pPr>
             <a:r>
+              <a:rPr dirty="0"/>
               <a:t>Example:</a:t>
             </a:r>
           </a:p>
@@ -3383,6 +3394,7 @@
               <a:defRPr sz="1900"/>
             </a:pPr>
             <a:r>
+              <a:rPr dirty="0"/>
               <a:t>X = (1, 2)</a:t>
             </a:r>
           </a:p>
@@ -3394,6 +3406,7 @@
               <a:defRPr sz="1900"/>
             </a:pPr>
             <a:r>
+              <a:rPr dirty="0"/>
               <a:t>Y = (2, 1)</a:t>
             </a:r>
           </a:p>
@@ -3405,6 +3418,7 @@
               <a:defRPr sz="1900"/>
             </a:pPr>
             <a:r>
+              <a:rPr dirty="0"/>
               <a:t>X·Y = (1×2) + (2×1) = 4</a:t>
             </a:r>
           </a:p>
@@ -3416,6 +3430,7 @@
               <a:defRPr sz="1900"/>
             </a:pPr>
             <a:r>
+              <a:rPr dirty="0"/>
               <a:t>||X|| = √5 and ||Y|| = √5</a:t>
             </a:r>
           </a:p>
@@ -3427,6 +3442,7 @@
               <a:defRPr sz="1900"/>
             </a:pPr>
             <a:r>
+              <a:rPr dirty="0"/>
               <a:t>cos(θ) = 4 / 5</a:t>
             </a:r>
           </a:p>
@@ -3438,11 +3454,42 @@
               <a:defRPr sz="1900"/>
             </a:pPr>
             <a:r>
+              <a:rPr dirty="0"/>
               <a:t>Answer: 0.80 or 80%</a:t>
             </a:r>
           </a:p>
         </p:txBody>
       </p:sp>
+      <p:pic>
+        <p:nvPicPr>
+          <p:cNvPr id="6" name="Picture 5">
+            <a:extLst>
+              <a:ext uri="{FF2B5EF4-FFF2-40B4-BE49-F238E27FC236}">
+                <a16:creationId xmlns:a16="http://schemas.microsoft.com/office/drawing/2014/main" id="{7284B05A-4ABA-62BB-74BC-CED155BB6ECB}"/>
+              </a:ext>
+            </a:extLst>
+          </p:cNvPr>
+          <p:cNvPicPr>
+            <a:picLocks noChangeAspect="1"/>
+          </p:cNvPicPr>
+          <p:nvPr/>
+        </p:nvPicPr>
+        <p:blipFill>
+          <a:blip r:embed="rId2"/>
+          <a:stretch>
+            <a:fillRect/>
+          </a:stretch>
+        </p:blipFill>
+        <p:spPr>
+          <a:xfrm>
+            <a:off x="3929062" y="2910501"/>
+            <a:ext cx="4333875" cy="866775"/>
+          </a:xfrm>
+          <a:prstGeom prst="rect">
+            <a:avLst/>
+          </a:prstGeom>
+        </p:spPr>
+      </p:pic>
     </p:spTree>
   </p:cSld>
   <p:clrMapOvr>
@@ -3452,7 +3499,7 @@
 </file>
 
 <file path=ppt/slides/slide11.xml><?xml version="1.0" encoding="utf-8"?>
-<p:sld xmlns:a="http://schemas.openxmlformats.org/drawingml/2006/main" xmlns:p="http://schemas.openxmlformats.org/presentationml/2006/main" xmlns:r="http://schemas.openxmlformats.org/officeDocument/2006/relationships">
+<p:sld xmlns:a="http://schemas.openxmlformats.org/drawingml/2006/main" xmlns:r="http://schemas.openxmlformats.org/officeDocument/2006/relationships" xmlns:p="http://schemas.openxmlformats.org/presentationml/2006/main">
   <p:cSld>
     <p:spTree>
       <p:nvGrpSpPr>
@@ -3460,7 +3507,14 @@
         <p:cNvGrpSpPr/>
         <p:nvPr/>
       </p:nvGrpSpPr>
-      <p:grpSpPr/>
+      <p:grpSpPr>
+        <a:xfrm>
+          <a:off x="0" y="0"/>
+          <a:ext cx="0" cy="0"/>
+          <a:chOff x="0" y="0"/>
+          <a:chExt cx="0" cy="0"/>
+        </a:xfrm>
+      </p:grpSpPr>
       <p:sp>
         <p:nvSpPr>
           <p:cNvPr id="2" name="TextBox 1"/>
@@ -3621,7 +3675,7 @@
 </file>
 
 <file path=ppt/slides/slide12.xml><?xml version="1.0" encoding="utf-8"?>
-<p:sld xmlns:a="http://schemas.openxmlformats.org/drawingml/2006/main" xmlns:p="http://schemas.openxmlformats.org/presentationml/2006/main" xmlns:r="http://schemas.openxmlformats.org/officeDocument/2006/relationships">
+<p:sld xmlns:a="http://schemas.openxmlformats.org/drawingml/2006/main" xmlns:r="http://schemas.openxmlformats.org/officeDocument/2006/relationships" xmlns:p="http://schemas.openxmlformats.org/presentationml/2006/main">
   <p:cSld>
     <p:spTree>
       <p:nvGrpSpPr>
@@ -3629,7 +3683,14 @@
         <p:cNvGrpSpPr/>
         <p:nvPr/>
       </p:nvGrpSpPr>
-      <p:grpSpPr/>
+      <p:grpSpPr>
+        <a:xfrm>
+          <a:off x="0" y="0"/>
+          <a:ext cx="0" cy="0"/>
+          <a:chOff x="0" y="0"/>
+          <a:chExt cx="0" cy="0"/>
+        </a:xfrm>
+      </p:grpSpPr>
       <p:sp>
         <p:nvSpPr>
           <p:cNvPr id="2" name="TextBox 1"/>
@@ -3680,10 +3741,34 @@
                 <a:tableStyleId>{5C22544A-7EE6-4342-B048-85BDC9FD1C3A}</a:tableStyleId>
               </a:tblPr>
               <a:tblGrid>
-                <a:gridCol w="2788920"/>
-                <a:gridCol w="2788920"/>
-                <a:gridCol w="2788920"/>
-                <a:gridCol w="2788920"/>
+                <a:gridCol w="2788920">
+                  <a:extLst>
+                    <a:ext uri="{9D8B030D-6E8A-4147-A177-3AD203B41FA5}">
+                      <a16:colId xmlns:a16="http://schemas.microsoft.com/office/drawing/2014/main" val="20000"/>
+                    </a:ext>
+                  </a:extLst>
+                </a:gridCol>
+                <a:gridCol w="2788920">
+                  <a:extLst>
+                    <a:ext uri="{9D8B030D-6E8A-4147-A177-3AD203B41FA5}">
+                      <a16:colId xmlns:a16="http://schemas.microsoft.com/office/drawing/2014/main" val="20001"/>
+                    </a:ext>
+                  </a:extLst>
+                </a:gridCol>
+                <a:gridCol w="2788920">
+                  <a:extLst>
+                    <a:ext uri="{9D8B030D-6E8A-4147-A177-3AD203B41FA5}">
+                      <a16:colId xmlns:a16="http://schemas.microsoft.com/office/drawing/2014/main" val="20002"/>
+                    </a:ext>
+                  </a:extLst>
+                </a:gridCol>
+                <a:gridCol w="2788920">
+                  <a:extLst>
+                    <a:ext uri="{9D8B030D-6E8A-4147-A177-3AD203B41FA5}">
+                      <a16:colId xmlns:a16="http://schemas.microsoft.com/office/drawing/2014/main" val="20003"/>
+                    </a:ext>
+                  </a:extLst>
+                </a:gridCol>
               </a:tblGrid>
               <a:tr h="640080">
                 <a:tc>
@@ -3746,6 +3831,11 @@
                   </a:txBody>
                   <a:tcPr/>
                 </a:tc>
+                <a:extLst>
+                  <a:ext uri="{0D108BD9-81ED-4DB2-BD59-A6C34878D82A}">
+                    <a16:rowId xmlns:a16="http://schemas.microsoft.com/office/drawing/2014/main" val="10000"/>
+                  </a:ext>
+                </a:extLst>
               </a:tr>
               <a:tr h="640080">
                 <a:tc>
@@ -3808,6 +3898,11 @@
                   </a:txBody>
                   <a:tcPr/>
                 </a:tc>
+                <a:extLst>
+                  <a:ext uri="{0D108BD9-81ED-4DB2-BD59-A6C34878D82A}">
+                    <a16:rowId xmlns:a16="http://schemas.microsoft.com/office/drawing/2014/main" val="10001"/>
+                  </a:ext>
+                </a:extLst>
               </a:tr>
               <a:tr h="640080">
                 <a:tc>
@@ -3870,6 +3965,11 @@
                   </a:txBody>
                   <a:tcPr/>
                 </a:tc>
+                <a:extLst>
+                  <a:ext uri="{0D108BD9-81ED-4DB2-BD59-A6C34878D82A}">
+                    <a16:rowId xmlns:a16="http://schemas.microsoft.com/office/drawing/2014/main" val="10002"/>
+                  </a:ext>
+                </a:extLst>
               </a:tr>
               <a:tr h="640080">
                 <a:tc>
@@ -3932,6 +4032,11 @@
                   </a:txBody>
                   <a:tcPr/>
                 </a:tc>
+                <a:extLst>
+                  <a:ext uri="{0D108BD9-81ED-4DB2-BD59-A6C34878D82A}">
+                    <a16:rowId xmlns:a16="http://schemas.microsoft.com/office/drawing/2014/main" val="10003"/>
+                  </a:ext>
+                </a:extLst>
               </a:tr>
               <a:tr h="640080">
                 <a:tc>
@@ -3994,6 +4099,11 @@
                   </a:txBody>
                   <a:tcPr/>
                 </a:tc>
+                <a:extLst>
+                  <a:ext uri="{0D108BD9-81ED-4DB2-BD59-A6C34878D82A}">
+                    <a16:rowId xmlns:a16="http://schemas.microsoft.com/office/drawing/2014/main" val="10004"/>
+                  </a:ext>
+                </a:extLst>
               </a:tr>
               <a:tr h="640080">
                 <a:tc>
@@ -4056,6 +4166,11 @@
                   </a:txBody>
                   <a:tcPr/>
                 </a:tc>
+                <a:extLst>
+                  <a:ext uri="{0D108BD9-81ED-4DB2-BD59-A6C34878D82A}">
+                    <a16:rowId xmlns:a16="http://schemas.microsoft.com/office/drawing/2014/main" val="10005"/>
+                  </a:ext>
+                </a:extLst>
               </a:tr>
               <a:tr h="640080">
                 <a:tc>
@@ -4118,6 +4233,11 @@
                   </a:txBody>
                   <a:tcPr/>
                 </a:tc>
+                <a:extLst>
+                  <a:ext uri="{0D108BD9-81ED-4DB2-BD59-A6C34878D82A}">
+                    <a16:rowId xmlns:a16="http://schemas.microsoft.com/office/drawing/2014/main" val="10006"/>
+                  </a:ext>
+                </a:extLst>
               </a:tr>
             </a:tbl>
           </a:graphicData>
@@ -4132,7 +4252,7 @@
 </file>
 
 <file path=ppt/slides/slide13.xml><?xml version="1.0" encoding="utf-8"?>
-<p:sld xmlns:a="http://schemas.openxmlformats.org/drawingml/2006/main" xmlns:p="http://schemas.openxmlformats.org/presentationml/2006/main" xmlns:r="http://schemas.openxmlformats.org/officeDocument/2006/relationships">
+<p:sld xmlns:a="http://schemas.openxmlformats.org/drawingml/2006/main" xmlns:r="http://schemas.openxmlformats.org/officeDocument/2006/relationships" xmlns:p="http://schemas.openxmlformats.org/presentationml/2006/main">
   <p:cSld>
     <p:spTree>
       <p:nvGrpSpPr>
@@ -4140,7 +4260,14 @@
         <p:cNvGrpSpPr/>
         <p:nvPr/>
       </p:nvGrpSpPr>
-      <p:grpSpPr/>
+      <p:grpSpPr>
+        <a:xfrm>
+          <a:off x="0" y="0"/>
+          <a:ext cx="0" cy="0"/>
+          <a:chOff x="0" y="0"/>
+          <a:chExt cx="0" cy="0"/>
+        </a:xfrm>
+      </p:grpSpPr>
       <p:sp>
         <p:nvSpPr>
           <p:cNvPr id="2" name="TextBox 1"/>
@@ -4292,7 +4419,7 @@
 </file>
 
 <file path=ppt/slides/slide14.xml><?xml version="1.0" encoding="utf-8"?>
-<p:sld xmlns:a="http://schemas.openxmlformats.org/drawingml/2006/main" xmlns:p="http://schemas.openxmlformats.org/presentationml/2006/main" xmlns:r="http://schemas.openxmlformats.org/officeDocument/2006/relationships">
+<p:sld xmlns:a="http://schemas.openxmlformats.org/drawingml/2006/main" xmlns:r="http://schemas.openxmlformats.org/officeDocument/2006/relationships" xmlns:p="http://schemas.openxmlformats.org/presentationml/2006/main">
   <p:cSld>
     <p:spTree>
       <p:nvGrpSpPr>
@@ -4300,7 +4427,14 @@
         <p:cNvGrpSpPr/>
         <p:nvPr/>
       </p:nvGrpSpPr>
-      <p:grpSpPr/>
+      <p:grpSpPr>
+        <a:xfrm>
+          <a:off x="0" y="0"/>
+          <a:ext cx="0" cy="0"/>
+          <a:chOff x="0" y="0"/>
+          <a:chExt cx="0" cy="0"/>
+        </a:xfrm>
+      </p:grpSpPr>
       <p:sp>
         <p:nvSpPr>
           <p:cNvPr id="2" name="TextBox 1"/>
@@ -4417,7 +4551,7 @@
 </file>
 
 <file path=ppt/slides/slide2.xml><?xml version="1.0" encoding="utf-8"?>
-<p:sld xmlns:a="http://schemas.openxmlformats.org/drawingml/2006/main" xmlns:p="http://schemas.openxmlformats.org/presentationml/2006/main" xmlns:r="http://schemas.openxmlformats.org/officeDocument/2006/relationships">
+<p:sld xmlns:a="http://schemas.openxmlformats.org/drawingml/2006/main" xmlns:r="http://schemas.openxmlformats.org/officeDocument/2006/relationships" xmlns:p="http://schemas.openxmlformats.org/presentationml/2006/main">
   <p:cSld>
     <p:spTree>
       <p:nvGrpSpPr>
@@ -4425,7 +4559,14 @@
         <p:cNvGrpSpPr/>
         <p:nvPr/>
       </p:nvGrpSpPr>
-      <p:grpSpPr/>
+      <p:grpSpPr>
+        <a:xfrm>
+          <a:off x="0" y="0"/>
+          <a:ext cx="0" cy="0"/>
+          <a:chOff x="0" y="0"/>
+          <a:chExt cx="0" cy="0"/>
+        </a:xfrm>
+      </p:grpSpPr>
       <p:sp>
         <p:nvSpPr>
           <p:cNvPr id="2" name="TextBox 1"/>
@@ -4544,7 +4685,7 @@
 </file>
 
 <file path=ppt/slides/slide3.xml><?xml version="1.0" encoding="utf-8"?>
-<p:sld xmlns:a="http://schemas.openxmlformats.org/drawingml/2006/main" xmlns:p="http://schemas.openxmlformats.org/presentationml/2006/main" xmlns:r="http://schemas.openxmlformats.org/officeDocument/2006/relationships">
+<p:sld xmlns:a="http://schemas.openxmlformats.org/drawingml/2006/main" xmlns:r="http://schemas.openxmlformats.org/officeDocument/2006/relationships" xmlns:p="http://schemas.openxmlformats.org/presentationml/2006/main">
   <p:cSld>
     <p:spTree>
       <p:nvGrpSpPr>
@@ -4552,7 +4693,14 @@
         <p:cNvGrpSpPr/>
         <p:nvPr/>
       </p:nvGrpSpPr>
-      <p:grpSpPr/>
+      <p:grpSpPr>
+        <a:xfrm>
+          <a:off x="0" y="0"/>
+          <a:ext cx="0" cy="0"/>
+          <a:chOff x="0" y="0"/>
+          <a:chExt cx="0" cy="0"/>
+        </a:xfrm>
+      </p:grpSpPr>
       <p:sp>
         <p:nvSpPr>
           <p:cNvPr id="2" name="TextBox 1"/>
@@ -4735,7 +4883,7 @@
 </file>
 
 <file path=ppt/slides/slide4.xml><?xml version="1.0" encoding="utf-8"?>
-<p:sld xmlns:a="http://schemas.openxmlformats.org/drawingml/2006/main" xmlns:p="http://schemas.openxmlformats.org/presentationml/2006/main" xmlns:r="http://schemas.openxmlformats.org/officeDocument/2006/relationships">
+<p:sld xmlns:a="http://schemas.openxmlformats.org/drawingml/2006/main" xmlns:r="http://schemas.openxmlformats.org/officeDocument/2006/relationships" xmlns:p="http://schemas.openxmlformats.org/presentationml/2006/main">
   <p:cSld>
     <p:spTree>
       <p:nvGrpSpPr>
@@ -4743,7 +4891,14 @@
         <p:cNvGrpSpPr/>
         <p:nvPr/>
       </p:nvGrpSpPr>
-      <p:grpSpPr/>
+      <p:grpSpPr>
+        <a:xfrm>
+          <a:off x="0" y="0"/>
+          <a:ext cx="0" cy="0"/>
+          <a:chOff x="0" y="0"/>
+          <a:chExt cx="0" cy="0"/>
+        </a:xfrm>
+      </p:grpSpPr>
       <p:sp>
         <p:nvSpPr>
           <p:cNvPr id="2" name="TextBox 1"/>
@@ -4926,7 +5081,7 @@
 </file>
 
 <file path=ppt/slides/slide5.xml><?xml version="1.0" encoding="utf-8"?>
-<p:sld xmlns:a="http://schemas.openxmlformats.org/drawingml/2006/main" xmlns:p="http://schemas.openxmlformats.org/presentationml/2006/main" xmlns:r="http://schemas.openxmlformats.org/officeDocument/2006/relationships">
+<p:sld xmlns:a="http://schemas.openxmlformats.org/drawingml/2006/main" xmlns:r="http://schemas.openxmlformats.org/officeDocument/2006/relationships" xmlns:p="http://schemas.openxmlformats.org/presentationml/2006/main">
   <p:cSld>
     <p:spTree>
       <p:nvGrpSpPr>
@@ -4934,7 +5089,14 @@
         <p:cNvGrpSpPr/>
         <p:nvPr/>
       </p:nvGrpSpPr>
-      <p:grpSpPr/>
+      <p:grpSpPr>
+        <a:xfrm>
+          <a:off x="0" y="0"/>
+          <a:ext cx="0" cy="0"/>
+          <a:chOff x="0" y="0"/>
+          <a:chExt cx="0" cy="0"/>
+        </a:xfrm>
+      </p:grpSpPr>
       <p:sp>
         <p:nvSpPr>
           <p:cNvPr id="2" name="TextBox 1"/>
@@ -5106,7 +5268,7 @@
 </file>
 
 <file path=ppt/slides/slide6.xml><?xml version="1.0" encoding="utf-8"?>
-<p:sld xmlns:a="http://schemas.openxmlformats.org/drawingml/2006/main" xmlns:p="http://schemas.openxmlformats.org/presentationml/2006/main" xmlns:r="http://schemas.openxmlformats.org/officeDocument/2006/relationships">
+<p:sld xmlns:a="http://schemas.openxmlformats.org/drawingml/2006/main" xmlns:r="http://schemas.openxmlformats.org/officeDocument/2006/relationships" xmlns:p="http://schemas.openxmlformats.org/presentationml/2006/main">
   <p:cSld>
     <p:spTree>
       <p:nvGrpSpPr>
@@ -5114,7 +5276,14 @@
         <p:cNvGrpSpPr/>
         <p:nvPr/>
       </p:nvGrpSpPr>
-      <p:grpSpPr/>
+      <p:grpSpPr>
+        <a:xfrm>
+          <a:off x="0" y="0"/>
+          <a:ext cx="0" cy="0"/>
+          <a:chOff x="0" y="0"/>
+          <a:chExt cx="0" cy="0"/>
+        </a:xfrm>
+      </p:grpSpPr>
       <p:sp>
         <p:nvSpPr>
           <p:cNvPr id="2" name="TextBox 1"/>
@@ -5297,7 +5466,7 @@
 </file>
 
 <file path=ppt/slides/slide7.xml><?xml version="1.0" encoding="utf-8"?>
-<p:sld xmlns:a="http://schemas.openxmlformats.org/drawingml/2006/main" xmlns:p="http://schemas.openxmlformats.org/presentationml/2006/main" xmlns:r="http://schemas.openxmlformats.org/officeDocument/2006/relationships">
+<p:sld xmlns:a="http://schemas.openxmlformats.org/drawingml/2006/main" xmlns:r="http://schemas.openxmlformats.org/officeDocument/2006/relationships" xmlns:p="http://schemas.openxmlformats.org/presentationml/2006/main">
   <p:cSld>
     <p:spTree>
       <p:nvGrpSpPr>
@@ -5305,7 +5474,14 @@
         <p:cNvGrpSpPr/>
         <p:nvPr/>
       </p:nvGrpSpPr>
-      <p:grpSpPr/>
+      <p:grpSpPr>
+        <a:xfrm>
+          <a:off x="0" y="0"/>
+          <a:ext cx="0" cy="0"/>
+          <a:chOff x="0" y="0"/>
+          <a:chExt cx="0" cy="0"/>
+        </a:xfrm>
+      </p:grpSpPr>
       <p:sp>
         <p:nvSpPr>
           <p:cNvPr id="2" name="TextBox 1"/>
@@ -5466,7 +5642,7 @@
 </file>
 
 <file path=ppt/slides/slide8.xml><?xml version="1.0" encoding="utf-8"?>
-<p:sld xmlns:a="http://schemas.openxmlformats.org/drawingml/2006/main" xmlns:p="http://schemas.openxmlformats.org/presentationml/2006/main" xmlns:r="http://schemas.openxmlformats.org/officeDocument/2006/relationships">
+<p:sld xmlns:a="http://schemas.openxmlformats.org/drawingml/2006/main" xmlns:r="http://schemas.openxmlformats.org/officeDocument/2006/relationships" xmlns:p="http://schemas.openxmlformats.org/presentationml/2006/main">
   <p:cSld>
     <p:spTree>
       <p:nvGrpSpPr>
@@ -5474,7 +5650,14 @@
         <p:cNvGrpSpPr/>
         <p:nvPr/>
       </p:nvGrpSpPr>
-      <p:grpSpPr/>
+      <p:grpSpPr>
+        <a:xfrm>
+          <a:off x="0" y="0"/>
+          <a:ext cx="0" cy="0"/>
+          <a:chOff x="0" y="0"/>
+          <a:chExt cx="0" cy="0"/>
+        </a:xfrm>
+      </p:grpSpPr>
       <p:sp>
         <p:nvSpPr>
           <p:cNvPr id="2" name="TextBox 1"/>
@@ -5657,7 +5840,7 @@
 </file>
 
 <file path=ppt/slides/slide9.xml><?xml version="1.0" encoding="utf-8"?>
-<p:sld xmlns:a="http://schemas.openxmlformats.org/drawingml/2006/main" xmlns:p="http://schemas.openxmlformats.org/presentationml/2006/main" xmlns:r="http://schemas.openxmlformats.org/officeDocument/2006/relationships">
+<p:sld xmlns:a="http://schemas.openxmlformats.org/drawingml/2006/main" xmlns:r="http://schemas.openxmlformats.org/officeDocument/2006/relationships" xmlns:p="http://schemas.openxmlformats.org/presentationml/2006/main">
   <p:cSld>
     <p:spTree>
       <p:nvGrpSpPr>
@@ -5665,7 +5848,14 @@
         <p:cNvGrpSpPr/>
         <p:nvPr/>
       </p:nvGrpSpPr>
-      <p:grpSpPr/>
+      <p:grpSpPr>
+        <a:xfrm>
+          <a:off x="0" y="0"/>
+          <a:ext cx="0" cy="0"/>
+          <a:chOff x="0" y="0"/>
+          <a:chExt cx="0" cy="0"/>
+        </a:xfrm>
+      </p:grpSpPr>
       <p:sp>
         <p:nvSpPr>
           <p:cNvPr id="2" name="TextBox 1"/>
